--- a/presentations/briefing-executivo-latest.pptx
+++ b/presentations/briefing-executivo-latest.pptx
@@ -3247,7 +3247,7 @@
               <a:defRPr sz="1900"/>
             </a:pPr>
             <a:r>
-              <a:t>19,991 registros de candidatura</a:t>
+              <a:t>20,000 registros de candidatura</a:t>
             </a:r>
           </a:p>
           <a:p>

--- a/presentations/briefing-executivo-latest.pptx
+++ b/presentations/briefing-executivo-latest.pptx
@@ -3153,7 +3153,7 @@
               <a:defRPr sz="1900"/>
             </a:pPr>
             <a:r>
-              <a:t>Snapshot 2026-09-05 · v0.3.1</a:t>
+              <a:t>Snapshot 2026-09-11 · v0.3.1</a:t>
             </a:r>
           </a:p>
           <a:p>
@@ -3247,7 +3247,7 @@
               <a:defRPr sz="1900"/>
             </a:pPr>
             <a:r>
-              <a:t>20,000 registros de candidatura</a:t>
+              <a:t>20,019 registros de candidatura</a:t>
             </a:r>
           </a:p>
           <a:p>
@@ -3258,7 +3258,7 @@
               <a:defRPr sz="1900"/>
             </a:pPr>
             <a:r>
-              <a:t>Receitas agregadas: R$ 3,477,418,529.19</a:t>
+              <a:t>Receitas agregadas: R$ 4,537,986,375.17</a:t>
             </a:r>
           </a:p>
           <a:p>
@@ -3269,7 +3269,7 @@
               <a:defRPr sz="1900"/>
             </a:pPr>
             <a:r>
-              <a:t>Despesas contratadas: R$ 364,858,409.72</a:t>
+              <a:t>Despesas contratadas: R$ 781,031,714.09</a:t>
             </a:r>
           </a:p>
         </p:txBody>
